--- a/dok/Präsentation Streetlore Basel_Final.pptx
+++ b/dok/Präsentation Streetlore Basel_Final.pptx
@@ -151,9 +151,295 @@
 <file path=ppt/revisionInfo.xml><?xml version="1.0" encoding="utf-8"?>
 <p1510:revInfo xmlns:a="http://schemas.openxmlformats.org/drawingml/2006/main" xmlns:r="http://schemas.openxmlformats.org/officeDocument/2006/relationships" xmlns:p1510="http://schemas.microsoft.com/office/powerpoint/2015/10/main">
   <p1510:revLst>
+    <p1510:client id="{186633BF-2256-4FBC-851F-726DB8ACE301}" v="2" dt="2026-05-22T08:38:25.886"/>
     <p1510:client id="{8B846EC0-6514-4CCD-BA85-0CD375BCA31D}" v="2" dt="2026-05-22T08:15:15.440"/>
   </p1510:revLst>
 </p1510:revInfo>
+</file>
+
+<file path=ppt/changesInfos/changesInfo1.xml><?xml version="1.0" encoding="utf-8"?>
+<pc:chgInfo xmlns:a="http://schemas.openxmlformats.org/drawingml/2006/main" xmlns:r="http://schemas.openxmlformats.org/officeDocument/2006/relationships" xmlns:ac="http://schemas.microsoft.com/office/drawing/2013/main/command" xmlns:pc="http://schemas.microsoft.com/office/powerpoint/2013/main/command">
+  <pc:docChgLst>
+    <pc:chgData name="Kelan Darwin Schmitter (s)" userId="1a1efc5b-5b33-45c2-bf01-314921bc7d6f" providerId="ADAL" clId="{186633BF-2256-4FBC-851F-726DB8ACE301}"/>
+    <pc:docChg chg="undo custSel modSld">
+      <pc:chgData name="Kelan Darwin Schmitter (s)" userId="1a1efc5b-5b33-45c2-bf01-314921bc7d6f" providerId="ADAL" clId="{186633BF-2256-4FBC-851F-726DB8ACE301}" dt="2026-05-22T08:39:49.205" v="26" actId="20577"/>
+      <pc:docMkLst>
+        <pc:docMk/>
+      </pc:docMkLst>
+      <pc:sldChg chg="modSp mod">
+        <pc:chgData name="Kelan Darwin Schmitter (s)" userId="1a1efc5b-5b33-45c2-bf01-314921bc7d6f" providerId="ADAL" clId="{186633BF-2256-4FBC-851F-726DB8ACE301}" dt="2026-05-22T08:39:02.935" v="10" actId="27636"/>
+        <pc:sldMkLst>
+          <pc:docMk/>
+          <pc:sldMk cId="236505306" sldId="309"/>
+        </pc:sldMkLst>
+        <pc:spChg chg="mod">
+          <ac:chgData name="Kelan Darwin Schmitter (s)" userId="1a1efc5b-5b33-45c2-bf01-314921bc7d6f" providerId="ADAL" clId="{186633BF-2256-4FBC-851F-726DB8ACE301}" dt="2026-05-22T08:39:02.935" v="10" actId="27636"/>
+          <ac:spMkLst>
+            <pc:docMk/>
+            <pc:sldMk cId="236505306" sldId="309"/>
+            <ac:spMk id="9" creationId="{ED1A31C7-D9A8-177C-06D4-108B3E5A62C1}"/>
+          </ac:spMkLst>
+        </pc:spChg>
+      </pc:sldChg>
+      <pc:sldChg chg="modSp mod">
+        <pc:chgData name="Kelan Darwin Schmitter (s)" userId="1a1efc5b-5b33-45c2-bf01-314921bc7d6f" providerId="ADAL" clId="{186633BF-2256-4FBC-851F-726DB8ACE301}" dt="2026-05-22T08:39:21.999" v="19"/>
+        <pc:sldMkLst>
+          <pc:docMk/>
+          <pc:sldMk cId="654712640" sldId="314"/>
+        </pc:sldMkLst>
+        <pc:spChg chg="mod">
+          <ac:chgData name="Kelan Darwin Schmitter (s)" userId="1a1efc5b-5b33-45c2-bf01-314921bc7d6f" providerId="ADAL" clId="{186633BF-2256-4FBC-851F-726DB8ACE301}" dt="2026-05-22T08:39:21.999" v="19"/>
+          <ac:spMkLst>
+            <pc:docMk/>
+            <pc:sldMk cId="654712640" sldId="314"/>
+            <ac:spMk id="5" creationId="{F3A40D4F-A48E-6DFB-EFB7-B020121386AF}"/>
+          </ac:spMkLst>
+        </pc:spChg>
+      </pc:sldChg>
+      <pc:sldChg chg="modSp mod">
+        <pc:chgData name="Kelan Darwin Schmitter (s)" userId="1a1efc5b-5b33-45c2-bf01-314921bc7d6f" providerId="ADAL" clId="{186633BF-2256-4FBC-851F-726DB8ACE301}" dt="2026-05-22T08:38:47.413" v="4"/>
+        <pc:sldMkLst>
+          <pc:docMk/>
+          <pc:sldMk cId="2591685694" sldId="316"/>
+        </pc:sldMkLst>
+        <pc:spChg chg="mod">
+          <ac:chgData name="Kelan Darwin Schmitter (s)" userId="1a1efc5b-5b33-45c2-bf01-314921bc7d6f" providerId="ADAL" clId="{186633BF-2256-4FBC-851F-726DB8ACE301}" dt="2026-05-22T08:38:47.413" v="4"/>
+          <ac:spMkLst>
+            <pc:docMk/>
+            <pc:sldMk cId="2591685694" sldId="316"/>
+            <ac:spMk id="5" creationId="{B61BFB8F-1311-3525-94BB-EFCA41BA4753}"/>
+          </ac:spMkLst>
+        </pc:spChg>
+      </pc:sldChg>
+      <pc:sldChg chg="modSp mod">
+        <pc:chgData name="Kelan Darwin Schmitter (s)" userId="1a1efc5b-5b33-45c2-bf01-314921bc7d6f" providerId="ADAL" clId="{186633BF-2256-4FBC-851F-726DB8ACE301}" dt="2026-05-22T08:38:55.551" v="6"/>
+        <pc:sldMkLst>
+          <pc:docMk/>
+          <pc:sldMk cId="2465184239" sldId="317"/>
+        </pc:sldMkLst>
+        <pc:spChg chg="mod">
+          <ac:chgData name="Kelan Darwin Schmitter (s)" userId="1a1efc5b-5b33-45c2-bf01-314921bc7d6f" providerId="ADAL" clId="{186633BF-2256-4FBC-851F-726DB8ACE301}" dt="2026-05-22T08:38:55.551" v="6"/>
+          <ac:spMkLst>
+            <pc:docMk/>
+            <pc:sldMk cId="2465184239" sldId="317"/>
+            <ac:spMk id="5" creationId="{DAB90E4E-CCF8-9E71-E58D-FF54CF5B1ADE}"/>
+          </ac:spMkLst>
+        </pc:spChg>
+      </pc:sldChg>
+      <pc:sldChg chg="modSp mod">
+        <pc:chgData name="Kelan Darwin Schmitter (s)" userId="1a1efc5b-5b33-45c2-bf01-314921bc7d6f" providerId="ADAL" clId="{186633BF-2256-4FBC-851F-726DB8ACE301}" dt="2026-05-22T08:39:13.930" v="16" actId="27636"/>
+        <pc:sldMkLst>
+          <pc:docMk/>
+          <pc:sldMk cId="2739965692" sldId="319"/>
+        </pc:sldMkLst>
+        <pc:spChg chg="mod">
+          <ac:chgData name="Kelan Darwin Schmitter (s)" userId="1a1efc5b-5b33-45c2-bf01-314921bc7d6f" providerId="ADAL" clId="{186633BF-2256-4FBC-851F-726DB8ACE301}" dt="2026-05-22T08:39:13.930" v="16" actId="27636"/>
+          <ac:spMkLst>
+            <pc:docMk/>
+            <pc:sldMk cId="2739965692" sldId="319"/>
+            <ac:spMk id="5" creationId="{261B3CAA-B383-C847-064F-58E95C82EC40}"/>
+          </ac:spMkLst>
+        </pc:spChg>
+      </pc:sldChg>
+      <pc:sldChg chg="modSp mod">
+        <pc:chgData name="Kelan Darwin Schmitter (s)" userId="1a1efc5b-5b33-45c2-bf01-314921bc7d6f" providerId="ADAL" clId="{186633BF-2256-4FBC-851F-726DB8ACE301}" dt="2026-05-22T08:39:30.204" v="21"/>
+        <pc:sldMkLst>
+          <pc:docMk/>
+          <pc:sldMk cId="2492609120" sldId="320"/>
+        </pc:sldMkLst>
+        <pc:spChg chg="mod">
+          <ac:chgData name="Kelan Darwin Schmitter (s)" userId="1a1efc5b-5b33-45c2-bf01-314921bc7d6f" providerId="ADAL" clId="{186633BF-2256-4FBC-851F-726DB8ACE301}" dt="2026-05-22T08:39:30.204" v="21"/>
+          <ac:spMkLst>
+            <pc:docMk/>
+            <pc:sldMk cId="2492609120" sldId="320"/>
+            <ac:spMk id="5" creationId="{409E3E01-DC67-DD69-E43A-BD486C18ABDB}"/>
+          </ac:spMkLst>
+        </pc:spChg>
+      </pc:sldChg>
+      <pc:sldChg chg="modSp mod">
+        <pc:chgData name="Kelan Darwin Schmitter (s)" userId="1a1efc5b-5b33-45c2-bf01-314921bc7d6f" providerId="ADAL" clId="{186633BF-2256-4FBC-851F-726DB8ACE301}" dt="2026-05-22T08:39:39.182" v="23"/>
+        <pc:sldMkLst>
+          <pc:docMk/>
+          <pc:sldMk cId="2491050666" sldId="321"/>
+        </pc:sldMkLst>
+        <pc:spChg chg="mod">
+          <ac:chgData name="Kelan Darwin Schmitter (s)" userId="1a1efc5b-5b33-45c2-bf01-314921bc7d6f" providerId="ADAL" clId="{186633BF-2256-4FBC-851F-726DB8ACE301}" dt="2026-05-22T08:39:39.182" v="23"/>
+          <ac:spMkLst>
+            <pc:docMk/>
+            <pc:sldMk cId="2491050666" sldId="321"/>
+            <ac:spMk id="5" creationId="{EC8E6F6B-F52D-6E03-5190-8593EA0C4521}"/>
+          </ac:spMkLst>
+        </pc:spChg>
+      </pc:sldChg>
+      <pc:sldChg chg="modSp mod">
+        <pc:chgData name="Kelan Darwin Schmitter (s)" userId="1a1efc5b-5b33-45c2-bf01-314921bc7d6f" providerId="ADAL" clId="{186633BF-2256-4FBC-851F-726DB8ACE301}" dt="2026-05-22T08:39:26.601" v="20"/>
+        <pc:sldMkLst>
+          <pc:docMk/>
+          <pc:sldMk cId="1767314235" sldId="324"/>
+        </pc:sldMkLst>
+        <pc:spChg chg="mod">
+          <ac:chgData name="Kelan Darwin Schmitter (s)" userId="1a1efc5b-5b33-45c2-bf01-314921bc7d6f" providerId="ADAL" clId="{186633BF-2256-4FBC-851F-726DB8ACE301}" dt="2026-05-22T08:39:26.601" v="20"/>
+          <ac:spMkLst>
+            <pc:docMk/>
+            <pc:sldMk cId="1767314235" sldId="324"/>
+            <ac:spMk id="5" creationId="{D77FC40A-337F-2170-D512-8870EF24B04D}"/>
+          </ac:spMkLst>
+        </pc:spChg>
+      </pc:sldChg>
+      <pc:sldChg chg="modSp mod">
+        <pc:chgData name="Kelan Darwin Schmitter (s)" userId="1a1efc5b-5b33-45c2-bf01-314921bc7d6f" providerId="ADAL" clId="{186633BF-2256-4FBC-851F-726DB8ACE301}" dt="2026-05-22T08:39:34.230" v="22"/>
+        <pc:sldMkLst>
+          <pc:docMk/>
+          <pc:sldMk cId="393876570" sldId="333"/>
+        </pc:sldMkLst>
+        <pc:spChg chg="mod">
+          <ac:chgData name="Kelan Darwin Schmitter (s)" userId="1a1efc5b-5b33-45c2-bf01-314921bc7d6f" providerId="ADAL" clId="{186633BF-2256-4FBC-851F-726DB8ACE301}" dt="2026-05-22T08:39:34.230" v="22"/>
+          <ac:spMkLst>
+            <pc:docMk/>
+            <pc:sldMk cId="393876570" sldId="333"/>
+            <ac:spMk id="5" creationId="{7B9956D1-549B-8982-CEDB-BFA11BA92608}"/>
+          </ac:spMkLst>
+        </pc:spChg>
+      </pc:sldChg>
+      <pc:sldChg chg="modSp mod">
+        <pc:chgData name="Kelan Darwin Schmitter (s)" userId="1a1efc5b-5b33-45c2-bf01-314921bc7d6f" providerId="ADAL" clId="{186633BF-2256-4FBC-851F-726DB8ACE301}" dt="2026-05-22T08:39:42.838" v="24"/>
+        <pc:sldMkLst>
+          <pc:docMk/>
+          <pc:sldMk cId="2157140248" sldId="337"/>
+        </pc:sldMkLst>
+        <pc:spChg chg="mod">
+          <ac:chgData name="Kelan Darwin Schmitter (s)" userId="1a1efc5b-5b33-45c2-bf01-314921bc7d6f" providerId="ADAL" clId="{186633BF-2256-4FBC-851F-726DB8ACE301}" dt="2026-05-22T08:39:42.838" v="24"/>
+          <ac:spMkLst>
+            <pc:docMk/>
+            <pc:sldMk cId="2157140248" sldId="337"/>
+            <ac:spMk id="5" creationId="{4E6364ED-8600-0943-79DC-5A7338C84ABC}"/>
+          </ac:spMkLst>
+        </pc:spChg>
+      </pc:sldChg>
+      <pc:sldChg chg="modSp mod">
+        <pc:chgData name="Kelan Darwin Schmitter (s)" userId="1a1efc5b-5b33-45c2-bf01-314921bc7d6f" providerId="ADAL" clId="{186633BF-2256-4FBC-851F-726DB8ACE301}" dt="2026-05-22T08:39:49.205" v="26" actId="20577"/>
+        <pc:sldMkLst>
+          <pc:docMk/>
+          <pc:sldMk cId="4232251199" sldId="338"/>
+        </pc:sldMkLst>
+        <pc:spChg chg="mod">
+          <ac:chgData name="Kelan Darwin Schmitter (s)" userId="1a1efc5b-5b33-45c2-bf01-314921bc7d6f" providerId="ADAL" clId="{186633BF-2256-4FBC-851F-726DB8ACE301}" dt="2026-05-22T08:39:49.205" v="26" actId="20577"/>
+          <ac:spMkLst>
+            <pc:docMk/>
+            <pc:sldMk cId="4232251199" sldId="338"/>
+            <ac:spMk id="3" creationId="{8A6020F0-8D46-E6FD-DEFE-2932732D2276}"/>
+          </ac:spMkLst>
+        </pc:spChg>
+        <pc:spChg chg="mod">
+          <ac:chgData name="Kelan Darwin Schmitter (s)" userId="1a1efc5b-5b33-45c2-bf01-314921bc7d6f" providerId="ADAL" clId="{186633BF-2256-4FBC-851F-726DB8ACE301}" dt="2026-05-22T08:39:46.650" v="25"/>
+          <ac:spMkLst>
+            <pc:docMk/>
+            <pc:sldMk cId="4232251199" sldId="338"/>
+            <ac:spMk id="5" creationId="{7E1F61AA-EB95-B518-F555-6F0823AC2D3D}"/>
+          </ac:spMkLst>
+        </pc:spChg>
+      </pc:sldChg>
+      <pc:sldChg chg="addSp modSp mod">
+        <pc:chgData name="Kelan Darwin Schmitter (s)" userId="1a1efc5b-5b33-45c2-bf01-314921bc7d6f" providerId="ADAL" clId="{186633BF-2256-4FBC-851F-726DB8ACE301}" dt="2026-05-22T08:38:36.463" v="2"/>
+        <pc:sldMkLst>
+          <pc:docMk/>
+          <pc:sldMk cId="3764328021" sldId="339"/>
+        </pc:sldMkLst>
+        <pc:spChg chg="mod">
+          <ac:chgData name="Kelan Darwin Schmitter (s)" userId="1a1efc5b-5b33-45c2-bf01-314921bc7d6f" providerId="ADAL" clId="{186633BF-2256-4FBC-851F-726DB8ACE301}" dt="2026-05-22T08:38:36.463" v="2"/>
+          <ac:spMkLst>
+            <pc:docMk/>
+            <pc:sldMk cId="3764328021" sldId="339"/>
+            <ac:spMk id="5" creationId="{60329AEE-2879-00E1-C60C-B1BC6E2A5945}"/>
+          </ac:spMkLst>
+        </pc:spChg>
+        <pc:picChg chg="add mod">
+          <ac:chgData name="Kelan Darwin Schmitter (s)" userId="1a1efc5b-5b33-45c2-bf01-314921bc7d6f" providerId="ADAL" clId="{186633BF-2256-4FBC-851F-726DB8ACE301}" dt="2026-05-22T08:38:25.886" v="1"/>
+          <ac:picMkLst>
+            <pc:docMk/>
+            <pc:sldMk cId="3764328021" sldId="339"/>
+            <ac:picMk id="7" creationId="{68E2A10B-B234-401F-9224-0625B450F9E4}"/>
+          </ac:picMkLst>
+        </pc:picChg>
+      </pc:sldChg>
+      <pc:sldChg chg="modSp mod">
+        <pc:chgData name="Kelan Darwin Schmitter (s)" userId="1a1efc5b-5b33-45c2-bf01-314921bc7d6f" providerId="ADAL" clId="{186633BF-2256-4FBC-851F-726DB8ACE301}" dt="2026-05-22T08:38:39.636" v="3"/>
+        <pc:sldMkLst>
+          <pc:docMk/>
+          <pc:sldMk cId="2120863460" sldId="341"/>
+        </pc:sldMkLst>
+        <pc:spChg chg="mod">
+          <ac:chgData name="Kelan Darwin Schmitter (s)" userId="1a1efc5b-5b33-45c2-bf01-314921bc7d6f" providerId="ADAL" clId="{186633BF-2256-4FBC-851F-726DB8ACE301}" dt="2026-05-22T08:38:39.636" v="3"/>
+          <ac:spMkLst>
+            <pc:docMk/>
+            <pc:sldMk cId="2120863460" sldId="341"/>
+            <ac:spMk id="5" creationId="{23224F1F-B7B8-6711-0AD1-58074CBF58C5}"/>
+          </ac:spMkLst>
+        </pc:spChg>
+      </pc:sldChg>
+      <pc:sldChg chg="modSp mod">
+        <pc:chgData name="Kelan Darwin Schmitter (s)" userId="1a1efc5b-5b33-45c2-bf01-314921bc7d6f" providerId="ADAL" clId="{186633BF-2256-4FBC-851F-726DB8ACE301}" dt="2026-05-22T08:38:51.385" v="5"/>
+        <pc:sldMkLst>
+          <pc:docMk/>
+          <pc:sldMk cId="247264080" sldId="342"/>
+        </pc:sldMkLst>
+        <pc:spChg chg="mod">
+          <ac:chgData name="Kelan Darwin Schmitter (s)" userId="1a1efc5b-5b33-45c2-bf01-314921bc7d6f" providerId="ADAL" clId="{186633BF-2256-4FBC-851F-726DB8ACE301}" dt="2026-05-22T08:38:51.385" v="5"/>
+          <ac:spMkLst>
+            <pc:docMk/>
+            <pc:sldMk cId="247264080" sldId="342"/>
+            <ac:spMk id="5" creationId="{71BFCA29-E80C-A91C-C67A-DEA85494A5A4}"/>
+          </ac:spMkLst>
+        </pc:spChg>
+      </pc:sldChg>
+      <pc:sldChg chg="modSp mod">
+        <pc:chgData name="Kelan Darwin Schmitter (s)" userId="1a1efc5b-5b33-45c2-bf01-314921bc7d6f" providerId="ADAL" clId="{186633BF-2256-4FBC-851F-726DB8ACE301}" dt="2026-05-22T08:38:59.238" v="8" actId="27636"/>
+        <pc:sldMkLst>
+          <pc:docMk/>
+          <pc:sldMk cId="864962966" sldId="343"/>
+        </pc:sldMkLst>
+        <pc:spChg chg="mod">
+          <ac:chgData name="Kelan Darwin Schmitter (s)" userId="1a1efc5b-5b33-45c2-bf01-314921bc7d6f" providerId="ADAL" clId="{186633BF-2256-4FBC-851F-726DB8ACE301}" dt="2026-05-22T08:38:59.238" v="8" actId="27636"/>
+          <ac:spMkLst>
+            <pc:docMk/>
+            <pc:sldMk cId="864962966" sldId="343"/>
+            <ac:spMk id="5" creationId="{D8BAFA80-FD78-0FCC-EC6F-1E81273E8291}"/>
+          </ac:spMkLst>
+        </pc:spChg>
+      </pc:sldChg>
+      <pc:sldChg chg="modSp mod">
+        <pc:chgData name="Kelan Darwin Schmitter (s)" userId="1a1efc5b-5b33-45c2-bf01-314921bc7d6f" providerId="ADAL" clId="{186633BF-2256-4FBC-851F-726DB8ACE301}" dt="2026-05-22T08:39:17.957" v="18" actId="27636"/>
+        <pc:sldMkLst>
+          <pc:docMk/>
+          <pc:sldMk cId="3737925299" sldId="344"/>
+        </pc:sldMkLst>
+        <pc:spChg chg="mod">
+          <ac:chgData name="Kelan Darwin Schmitter (s)" userId="1a1efc5b-5b33-45c2-bf01-314921bc7d6f" providerId="ADAL" clId="{186633BF-2256-4FBC-851F-726DB8ACE301}" dt="2026-05-22T08:39:17.957" v="18" actId="27636"/>
+          <ac:spMkLst>
+            <pc:docMk/>
+            <pc:sldMk cId="3737925299" sldId="344"/>
+            <ac:spMk id="5" creationId="{261B3CAA-B383-C847-064F-58E95C82EC40}"/>
+          </ac:spMkLst>
+        </pc:spChg>
+      </pc:sldChg>
+      <pc:sldChg chg="modSp mod">
+        <pc:chgData name="Kelan Darwin Schmitter (s)" userId="1a1efc5b-5b33-45c2-bf01-314921bc7d6f" providerId="ADAL" clId="{186633BF-2256-4FBC-851F-726DB8ACE301}" dt="2026-05-22T08:39:10.143" v="14" actId="27636"/>
+        <pc:sldMkLst>
+          <pc:docMk/>
+          <pc:sldMk cId="1116777687" sldId="347"/>
+        </pc:sldMkLst>
+        <pc:spChg chg="mod">
+          <ac:chgData name="Kelan Darwin Schmitter (s)" userId="1a1efc5b-5b33-45c2-bf01-314921bc7d6f" providerId="ADAL" clId="{186633BF-2256-4FBC-851F-726DB8ACE301}" dt="2026-05-22T08:39:10.143" v="14" actId="27636"/>
+          <ac:spMkLst>
+            <pc:docMk/>
+            <pc:sldMk cId="1116777687" sldId="347"/>
+            <ac:spMk id="4" creationId="{FBC94DBE-C047-420A-8840-945B162B2150}"/>
+          </ac:spMkLst>
+        </pc:spChg>
+      </pc:sldChg>
+    </pc:docChg>
+  </pc:docChgLst>
+</pc:chgInfo>
 </file>
 
 <file path=ppt/handoutMasters/handoutMaster1.xml><?xml version="1.0" encoding="utf-8"?>
@@ -4711,9 +4997,14 @@
           <a:lstStyle/>
           <a:p>
             <a:r>
-              <a:rPr lang="de-CH" noProof="0"/>
-              <a:t>Terrestrisches Laserscanning Kraftwerk Schlappin, Klosters</a:t>
-            </a:r>
+              <a:rPr lang="de-CH" dirty="0" err="1"/>
+              <a:t>Streetlore</a:t>
+            </a:r>
+            <a:r>
+              <a:rPr lang="de-CH" dirty="0"/>
+              <a:t> Basel </a:t>
+            </a:r>
+            <a:endParaRPr lang="de-CH" noProof="0" dirty="0"/>
           </a:p>
         </p:txBody>
       </p:sp>
@@ -4974,22 +5265,19 @@
         </p:spPr>
         <p:txBody>
           <a:bodyPr anchor="t">
-            <a:normAutofit/>
+            <a:normAutofit lnSpcReduction="10000"/>
           </a:bodyPr>
           <a:lstStyle/>
           <a:p>
-            <a:pPr>
-              <a:lnSpc>
-                <a:spcPct val="90000"/>
-              </a:lnSpc>
-              <a:spcAft>
-                <a:spcPts val="600"/>
-              </a:spcAft>
-            </a:pPr>
-            <a:r>
-              <a:rPr lang="de-CH" noProof="0"/>
-              <a:t>Terrestrisches Laserscanning Kraftwerk Schlappin, Klosters</a:t>
-            </a:r>
+            <a:r>
+              <a:rPr lang="de-CH" dirty="0" err="1"/>
+              <a:t>Streetlore</a:t>
+            </a:r>
+            <a:r>
+              <a:rPr lang="de-CH" dirty="0"/>
+              <a:t> Basel </a:t>
+            </a:r>
+            <a:endParaRPr lang="de-CH" noProof="0" dirty="0"/>
           </a:p>
         </p:txBody>
       </p:sp>
@@ -5449,22 +5737,19 @@
         </p:spPr>
         <p:txBody>
           <a:bodyPr anchor="t">
-            <a:normAutofit/>
+            <a:normAutofit lnSpcReduction="10000"/>
           </a:bodyPr>
           <a:lstStyle/>
           <a:p>
-            <a:pPr>
-              <a:lnSpc>
-                <a:spcPct val="90000"/>
-              </a:lnSpc>
-              <a:spcAft>
-                <a:spcPts val="600"/>
-              </a:spcAft>
-            </a:pPr>
-            <a:r>
-              <a:rPr lang="de-CH" noProof="0"/>
-              <a:t>Terrestrisches Laserscanning Kraftwerk Schlappin, Klosters</a:t>
-            </a:r>
+            <a:r>
+              <a:rPr lang="de-CH" dirty="0" err="1"/>
+              <a:t>Streetlore</a:t>
+            </a:r>
+            <a:r>
+              <a:rPr lang="de-CH" dirty="0"/>
+              <a:t> Basel </a:t>
+            </a:r>
+            <a:endParaRPr lang="de-CH" noProof="0" dirty="0"/>
           </a:p>
         </p:txBody>
       </p:sp>
@@ -5649,31 +5934,19 @@
         </p:spPr>
         <p:txBody>
           <a:bodyPr anchor="t">
-            <a:normAutofit/>
+            <a:normAutofit lnSpcReduction="10000"/>
           </a:bodyPr>
           <a:lstStyle/>
           <a:p>
-            <a:pPr>
-              <a:lnSpc>
-                <a:spcPct val="90000"/>
-              </a:lnSpc>
-              <a:spcAft>
-                <a:spcPts val="600"/>
-              </a:spcAft>
-            </a:pPr>
-            <a:r>
-              <a:rPr lang="de-DE"/>
-              <a:t>Terrestrisches Laserscanning Kraftwerk </a:t>
-            </a:r>
-            <a:r>
-              <a:rPr lang="de-DE" err="1"/>
-              <a:t>Schlappin</a:t>
-            </a:r>
-            <a:r>
-              <a:rPr lang="de-DE"/>
-              <a:t>, Klosters</a:t>
-            </a:r>
-            <a:endParaRPr lang="de-CH"/>
+            <a:r>
+              <a:rPr lang="de-CH" dirty="0" err="1"/>
+              <a:t>Streetlore</a:t>
+            </a:r>
+            <a:r>
+              <a:rPr lang="de-CH" dirty="0"/>
+              <a:t> Basel </a:t>
+            </a:r>
+            <a:endParaRPr lang="de-CH" noProof="0" dirty="0"/>
           </a:p>
         </p:txBody>
       </p:sp>
@@ -6017,22 +6290,19 @@
         </p:spPr>
         <p:txBody>
           <a:bodyPr anchor="t">
-            <a:normAutofit/>
+            <a:normAutofit lnSpcReduction="10000"/>
           </a:bodyPr>
           <a:lstStyle/>
           <a:p>
-            <a:pPr>
-              <a:lnSpc>
-                <a:spcPct val="90000"/>
-              </a:lnSpc>
-              <a:spcAft>
-                <a:spcPts val="600"/>
-              </a:spcAft>
-            </a:pPr>
-            <a:r>
-              <a:rPr lang="de-CH" noProof="0"/>
-              <a:t>Terrestrisches Laserscanning Kraftwerk Schlappin, Klosters</a:t>
-            </a:r>
+            <a:r>
+              <a:rPr lang="de-CH" dirty="0" err="1"/>
+              <a:t>Streetlore</a:t>
+            </a:r>
+            <a:r>
+              <a:rPr lang="de-CH" dirty="0"/>
+              <a:t> Basel </a:t>
+            </a:r>
+            <a:endParaRPr lang="de-CH" noProof="0" dirty="0"/>
           </a:p>
         </p:txBody>
       </p:sp>
@@ -6238,22 +6508,19 @@
         </p:spPr>
         <p:txBody>
           <a:bodyPr anchor="t">
-            <a:normAutofit/>
+            <a:normAutofit lnSpcReduction="10000"/>
           </a:bodyPr>
           <a:lstStyle/>
           <a:p>
-            <a:pPr>
-              <a:lnSpc>
-                <a:spcPct val="90000"/>
-              </a:lnSpc>
-              <a:spcAft>
-                <a:spcPts val="600"/>
-              </a:spcAft>
-            </a:pPr>
-            <a:r>
-              <a:rPr lang="de-CH" noProof="0"/>
-              <a:t>Terrestrisches Laserscanning Kraftwerk Schlappin, Klosters</a:t>
-            </a:r>
+            <a:r>
+              <a:rPr lang="de-CH" dirty="0" err="1"/>
+              <a:t>Streetlore</a:t>
+            </a:r>
+            <a:r>
+              <a:rPr lang="de-CH" dirty="0"/>
+              <a:t> Basel </a:t>
+            </a:r>
+            <a:endParaRPr lang="de-CH" noProof="0" dirty="0"/>
           </a:p>
         </p:txBody>
       </p:sp>
@@ -6614,9 +6881,14 @@
           <a:lstStyle/>
           <a:p>
             <a:r>
-              <a:rPr lang="de-CH" noProof="0"/>
-              <a:t>Terrestrisches Laserscanning Kraftwerk Schlappin, Klosters</a:t>
-            </a:r>
+              <a:rPr lang="de-CH" dirty="0" err="1"/>
+              <a:t>Streetlore</a:t>
+            </a:r>
+            <a:r>
+              <a:rPr lang="de-CH" dirty="0"/>
+              <a:t> Basel </a:t>
+            </a:r>
+            <a:endParaRPr lang="de-CH" noProof="0" dirty="0"/>
           </a:p>
         </p:txBody>
       </p:sp>
@@ -7072,9 +7344,14 @@
           <a:lstStyle/>
           <a:p>
             <a:r>
-              <a:rPr lang="de-CH" noProof="0"/>
-              <a:t>Terrestrisches Laserscanning Kraftwerk Schlappin, Klosters</a:t>
-            </a:r>
+              <a:rPr lang="de-CH" dirty="0" err="1"/>
+              <a:t>Streetlore</a:t>
+            </a:r>
+            <a:r>
+              <a:rPr lang="de-CH" dirty="0"/>
+              <a:t> Basel </a:t>
+            </a:r>
+            <a:endParaRPr lang="de-CH" noProof="0" dirty="0"/>
           </a:p>
         </p:txBody>
       </p:sp>
@@ -7449,9 +7726,14 @@
           <a:lstStyle/>
           <a:p>
             <a:r>
-              <a:rPr lang="de-CH" noProof="0"/>
-              <a:t>Terrestrisches Laserscanning Kraftwerk Schlappin, Klosters</a:t>
-            </a:r>
+              <a:rPr lang="de-CH" dirty="0" err="1"/>
+              <a:t>Streetlore</a:t>
+            </a:r>
+            <a:r>
+              <a:rPr lang="de-CH" dirty="0"/>
+              <a:t> Basel </a:t>
+            </a:r>
+            <a:endParaRPr lang="de-CH" noProof="0" dirty="0"/>
           </a:p>
         </p:txBody>
       </p:sp>
@@ -7683,9 +7965,14 @@
           <a:lstStyle/>
           <a:p>
             <a:r>
-              <a:rPr lang="de-CH" noProof="0"/>
-              <a:t>Terrestrisches Laserscanning Kraftwerk Schlappin, Klosters</a:t>
-            </a:r>
+              <a:rPr lang="de-CH" dirty="0" err="1"/>
+              <a:t>Streetlore</a:t>
+            </a:r>
+            <a:r>
+              <a:rPr lang="de-CH" dirty="0"/>
+              <a:t> Basel </a:t>
+            </a:r>
+            <a:endParaRPr lang="de-CH" noProof="0" dirty="0"/>
           </a:p>
         </p:txBody>
       </p:sp>
@@ -8044,9 +8331,14 @@
           <a:lstStyle/>
           <a:p>
             <a:r>
-              <a:rPr lang="de-CH" noProof="0"/>
-              <a:t>Terrestrisches Laserscanning Kraftwerk Schlappin, Klosters</a:t>
-            </a:r>
+              <a:rPr lang="de-CH" dirty="0" err="1"/>
+              <a:t>Streetlore</a:t>
+            </a:r>
+            <a:r>
+              <a:rPr lang="de-CH" dirty="0"/>
+              <a:t> Basel </a:t>
+            </a:r>
+            <a:endParaRPr lang="de-CH" noProof="0" dirty="0"/>
           </a:p>
         </p:txBody>
       </p:sp>
@@ -8213,9 +8505,14 @@
           <a:lstStyle/>
           <a:p>
             <a:r>
-              <a:rPr lang="de-CH" noProof="0"/>
-              <a:t>Terrestrisches Laserscanning Kraftwerk Schlappin, Klosters</a:t>
-            </a:r>
+              <a:rPr lang="de-CH" dirty="0" err="1"/>
+              <a:t>Streetlore</a:t>
+            </a:r>
+            <a:r>
+              <a:rPr lang="de-CH" dirty="0"/>
+              <a:t> Basel </a:t>
+            </a:r>
+            <a:endParaRPr lang="de-CH" noProof="0" dirty="0"/>
           </a:p>
         </p:txBody>
       </p:sp>
@@ -8301,7 +8598,7 @@
           <a:lstStyle/>
           <a:p>
             <a:r>
-              <a:rPr lang="de-CH" noProof="0"/>
+              <a:rPr lang="de-CH" noProof="0" dirty="0"/>
               <a:t>Fragen?</a:t>
             </a:r>
           </a:p>
@@ -8472,24 +8769,7 @@
           <a:bodyPr/>
           <a:lstStyle/>
           <a:p>
-            <a:r>
-              <a:rPr lang="de-CH" noProof="0"/>
-              <a:t>Aufgabenstellung Modul 3070 </a:t>
-            </a:r>
-            <a:r>
-              <a:rPr lang="de-CH" noProof="0" err="1"/>
-              <a:t>Feldkurs</a:t>
-            </a:r>
-            <a:r>
-              <a:rPr lang="de-CH" noProof="0"/>
-              <a:t> Vermessung I, FHNW</a:t>
-            </a:r>
-          </a:p>
-          <a:p>
-            <a:r>
-              <a:rPr lang="de-CH" noProof="0"/>
-              <a:t>Eigene Aufnahmen und Visualisierungen, Gruppe 7</a:t>
-            </a:r>
+            <a:endParaRPr lang="de-CH" noProof="0" dirty="0"/>
           </a:p>
         </p:txBody>
       </p:sp>
@@ -8543,9 +8823,14 @@
           <a:lstStyle/>
           <a:p>
             <a:r>
-              <a:rPr lang="de-CH" noProof="0"/>
-              <a:t>Terrestrisches Laserscanning Kraftwerk Schlappin, Klosters</a:t>
-            </a:r>
+              <a:rPr lang="de-CH" dirty="0" err="1"/>
+              <a:t>Streetlore</a:t>
+            </a:r>
+            <a:r>
+              <a:rPr lang="de-CH" dirty="0"/>
+              <a:t> Basel </a:t>
+            </a:r>
+            <a:endParaRPr lang="de-CH" noProof="0" dirty="0"/>
           </a:p>
         </p:txBody>
       </p:sp>
@@ -8911,17 +9196,14 @@
           <a:lstStyle/>
           <a:p>
             <a:r>
-              <a:rPr lang="de-CH" noProof="0"/>
-              <a:t>Terrestrisches Laserscanning Kraftwerk </a:t>
-            </a:r>
-            <a:r>
-              <a:rPr lang="de-CH" noProof="0" err="1"/>
-              <a:t>Schlappin</a:t>
-            </a:r>
-            <a:r>
-              <a:rPr lang="de-CH" noProof="0"/>
-              <a:t>, Klosters</a:t>
-            </a:r>
+              <a:rPr lang="de-CH" dirty="0" err="1"/>
+              <a:t>Streetlore</a:t>
+            </a:r>
+            <a:r>
+              <a:rPr lang="de-CH" dirty="0"/>
+              <a:t> Basel </a:t>
+            </a:r>
+            <a:endParaRPr lang="de-CH" noProof="0" dirty="0"/>
           </a:p>
         </p:txBody>
       </p:sp>
@@ -9166,9 +9448,14 @@
           <a:lstStyle/>
           <a:p>
             <a:r>
-              <a:rPr lang="de-CH" noProof="0"/>
-              <a:t>Terrestrisches Laserscanning Kraftwerk Schlappin, Klosters</a:t>
-            </a:r>
+              <a:rPr lang="de-CH" dirty="0" err="1"/>
+              <a:t>Streetlore</a:t>
+            </a:r>
+            <a:r>
+              <a:rPr lang="de-CH" dirty="0"/>
+              <a:t> Basel </a:t>
+            </a:r>
+            <a:endParaRPr lang="de-CH" noProof="0" dirty="0"/>
           </a:p>
         </p:txBody>
       </p:sp>
@@ -9490,9 +9777,14 @@
           <a:lstStyle/>
           <a:p>
             <a:r>
-              <a:rPr lang="de-CH" noProof="0"/>
-              <a:t>Terrestrisches Laserscanning Kraftwerk Schlappin, Klosters</a:t>
-            </a:r>
+              <a:rPr lang="de-CH" dirty="0" err="1"/>
+              <a:t>Streetlore</a:t>
+            </a:r>
+            <a:r>
+              <a:rPr lang="de-CH" dirty="0"/>
+              <a:t> Basel </a:t>
+            </a:r>
+            <a:endParaRPr lang="de-CH" noProof="0" dirty="0"/>
           </a:p>
         </p:txBody>
       </p:sp>
@@ -9735,9 +10027,14 @@
           <a:lstStyle/>
           <a:p>
             <a:r>
-              <a:rPr lang="de-CH" noProof="0"/>
-              <a:t>Terrestrisches Laserscanning Kraftwerk Schlappin, Klosters</a:t>
-            </a:r>
+              <a:rPr lang="de-CH" dirty="0" err="1"/>
+              <a:t>Streetlore</a:t>
+            </a:r>
+            <a:r>
+              <a:rPr lang="de-CH" dirty="0"/>
+              <a:t> Basel </a:t>
+            </a:r>
+            <a:endParaRPr lang="de-CH" noProof="0" dirty="0"/>
           </a:p>
         </p:txBody>
       </p:sp>
@@ -10856,6 +11153,15 @@
 </file>
 
 <file path=customXml/item2.xml><?xml version="1.0" encoding="utf-8"?>
+<?mso-contentType ?>
+<FormTemplates xmlns="http://schemas.microsoft.com/sharepoint/v3/contenttype/forms">
+  <Display>DocumentLibraryForm</Display>
+  <Edit>DocumentLibraryForm</Edit>
+  <New>DocumentLibraryForm</New>
+</FormTemplates>
+</file>
+
+<file path=customXml/item3.xml><?xml version="1.0" encoding="utf-8"?>
 <ct:contentTypeSchema xmlns:ct="http://schemas.microsoft.com/office/2006/metadata/contentType" xmlns:ma="http://schemas.microsoft.com/office/2006/metadata/properties/metaAttributes" ct:_="" ma:_="" ma:contentTypeName="Dokument" ma:contentTypeID="0x010100837E6128234EC548AB2003B7FFFD7248" ma:contentTypeVersion="12" ma:contentTypeDescription="Ein neues Dokument erstellen." ma:contentTypeScope="" ma:versionID="08fb2c8a7f6ac0b60f2ae0a74c344355">
   <xsd:schema xmlns:xsd="http://www.w3.org/2001/XMLSchema" xmlns:xs="http://www.w3.org/2001/XMLSchema" xmlns:p="http://schemas.microsoft.com/office/2006/metadata/properties" xmlns:ns2="a14b51b4-7e98-4bef-bc42-d2f4090b482d" xmlns:ns3="8cb485e5-cd52-454c-b439-58854f8d91fc" targetNamespace="http://schemas.microsoft.com/office/2006/metadata/properties" ma:root="true" ma:fieldsID="ef747a0b6acd61a1618fa8dd3b5a3823" ns2:_="" ns3:_="">
     <xsd:import namespace="a14b51b4-7e98-4bef-bc42-d2f4090b482d"/>
@@ -11056,15 +11362,6 @@
 </ct:contentTypeSchema>
 </file>
 
-<file path=customXml/item3.xml><?xml version="1.0" encoding="utf-8"?>
-<?mso-contentType ?>
-<FormTemplates xmlns="http://schemas.microsoft.com/sharepoint/v3/contenttype/forms">
-  <Display>DocumentLibraryForm</Display>
-  <Edit>DocumentLibraryForm</Edit>
-  <New>DocumentLibraryForm</New>
-</FormTemplates>
-</file>
-
 <file path=customXml/itemProps1.xml><?xml version="1.0" encoding="utf-8"?>
 <ds:datastoreItem xmlns:ds="http://schemas.openxmlformats.org/officeDocument/2006/customXml" ds:itemID="{5626B806-0237-4942-A1FD-5C97285908C2}">
   <ds:schemaRefs>
@@ -11083,6 +11380,14 @@
 </file>
 
 <file path=customXml/itemProps2.xml><?xml version="1.0" encoding="utf-8"?>
+<ds:datastoreItem xmlns:ds="http://schemas.openxmlformats.org/officeDocument/2006/customXml" ds:itemID="{4B6B7BE2-63AD-4C37-AC44-F0E4FC348E24}">
+  <ds:schemaRefs>
+    <ds:schemaRef ds:uri="http://schemas.microsoft.com/sharepoint/v3/contenttype/forms"/>
+  </ds:schemaRefs>
+</ds:datastoreItem>
+</file>
+
+<file path=customXml/itemProps3.xml><?xml version="1.0" encoding="utf-8"?>
 <ds:datastoreItem xmlns:ds="http://schemas.openxmlformats.org/officeDocument/2006/customXml" ds:itemID="{7BEB9D70-B786-4A00-9BD4-76FB5727A404}">
   <ds:schemaRefs>
     <ds:schemaRef ds:uri="8cb485e5-cd52-454c-b439-58854f8d91fc"/>
@@ -11101,14 +11406,6 @@
 </ds:datastoreItem>
 </file>
 
-<file path=customXml/itemProps3.xml><?xml version="1.0" encoding="utf-8"?>
-<ds:datastoreItem xmlns:ds="http://schemas.openxmlformats.org/officeDocument/2006/customXml" ds:itemID="{4B6B7BE2-63AD-4C37-AC44-F0E4FC348E24}">
-  <ds:schemaRefs>
-    <ds:schemaRef ds:uri="http://schemas.microsoft.com/sharepoint/v3/contenttype/forms"/>
-  </ds:schemaRefs>
-</ds:datastoreItem>
-</file>
-
 <file path=docMetadata/LabelInfo.xml><?xml version="1.0" encoding="utf-8"?>
 <clbl:labelList xmlns:clbl="http://schemas.microsoft.com/office/2020/mipLabelMetadata">
   <clbl:label id="{9d1a5fc8-321e-4101-ae63-530730711ac2}" enabled="0" method="" siteId="{9d1a5fc8-321e-4101-ae63-530730711ac2}" removed="1"/>

--- a/dok/Präsentation Streetlore Basel_Final.pptx
+++ b/dok/Präsentation Streetlore Basel_Final.pptx
@@ -162,7 +162,7 @@
   <pc:docChgLst>
     <pc:chgData name="Kelan Darwin Schmitter (s)" userId="1a1efc5b-5b33-45c2-bf01-314921bc7d6f" providerId="ADAL" clId="{186633BF-2256-4FBC-851F-726DB8ACE301}"/>
     <pc:docChg chg="undo custSel modSld">
-      <pc:chgData name="Kelan Darwin Schmitter (s)" userId="1a1efc5b-5b33-45c2-bf01-314921bc7d6f" providerId="ADAL" clId="{186633BF-2256-4FBC-851F-726DB8ACE301}" dt="2026-05-22T08:39:49.205" v="26" actId="20577"/>
+      <pc:chgData name="Kelan Darwin Schmitter (s)" userId="1a1efc5b-5b33-45c2-bf01-314921bc7d6f" providerId="ADAL" clId="{186633BF-2256-4FBC-851F-726DB8ACE301}" dt="2026-05-22T08:58:34.552" v="32" actId="20577"/>
       <pc:docMkLst>
         <pc:docMk/>
       </pc:docMkLst>
@@ -257,11 +257,19 @@
         </pc:spChg>
       </pc:sldChg>
       <pc:sldChg chg="modSp mod">
-        <pc:chgData name="Kelan Darwin Schmitter (s)" userId="1a1efc5b-5b33-45c2-bf01-314921bc7d6f" providerId="ADAL" clId="{186633BF-2256-4FBC-851F-726DB8ACE301}" dt="2026-05-22T08:39:39.182" v="23"/>
+        <pc:chgData name="Kelan Darwin Schmitter (s)" userId="1a1efc5b-5b33-45c2-bf01-314921bc7d6f" providerId="ADAL" clId="{186633BF-2256-4FBC-851F-726DB8ACE301}" dt="2026-05-22T08:58:34.552" v="32" actId="20577"/>
         <pc:sldMkLst>
           <pc:docMk/>
           <pc:sldMk cId="2491050666" sldId="321"/>
         </pc:sldMkLst>
+        <pc:spChg chg="mod">
+          <ac:chgData name="Kelan Darwin Schmitter (s)" userId="1a1efc5b-5b33-45c2-bf01-314921bc7d6f" providerId="ADAL" clId="{186633BF-2256-4FBC-851F-726DB8ACE301}" dt="2026-05-22T08:58:34.552" v="32" actId="20577"/>
+          <ac:spMkLst>
+            <pc:docMk/>
+            <pc:sldMk cId="2491050666" sldId="321"/>
+            <ac:spMk id="2" creationId="{C169819B-8C82-838D-741D-5BA1E7AB05E9}"/>
+          </ac:spMkLst>
+        </pc:spChg>
         <pc:spChg chg="mod">
           <ac:chgData name="Kelan Darwin Schmitter (s)" userId="1a1efc5b-5b33-45c2-bf01-314921bc7d6f" providerId="ADAL" clId="{186633BF-2256-4FBC-851F-726DB8ACE301}" dt="2026-05-22T08:39:39.182" v="23"/>
           <ac:spMkLst>
@@ -8249,10 +8257,9 @@
           <a:lstStyle/>
           <a:p>
             <a:r>
-              <a:rPr lang="de-CH" noProof="0" dirty="0" err="1"/>
-              <a:t>Reflezion</a:t>
-            </a:r>
-            <a:endParaRPr lang="de-CH" noProof="0" dirty="0"/>
+              <a:rPr lang="de-CH" noProof="0" dirty="0"/>
+              <a:t>Reflexion</a:t>
+            </a:r>
           </a:p>
         </p:txBody>
       </p:sp>
@@ -8795,7 +8802,7 @@
           <a:lstStyle/>
           <a:p>
             <a:r>
-              <a:rPr lang="de-CH" noProof="0"/>
+              <a:rPr lang="de-CH" noProof="0" dirty="0"/>
               <a:t>16. Dezember 2025</a:t>
             </a:r>
           </a:p>
